--- a/lessons-v2/day13/day13.pptx
+++ b/lessons-v2/day13/day13.pptx
@@ -534,7 +534,9 @@
 public records, look in the windows, note the delivery schedule — before touching anything.
 Scanning = walk up and try every door handle (and the neighbours hear you rattling them).
 ETHICS: passive recon only on the instructor-permitted domain. Active scans only on &lt;LAB_HOST&gt;
-(in the ROE) or scanme.nmap.org (the Nmap project explicitly allows scanning it).</a:t>
+(in the ROE) or scanme.nmap.org (the Nmap project explicitly allows scanning it). If you built
+your own lab (Day 11), &lt;LAB_HOST&gt; = your Metasploitable2 at 10.89.1.10 — see the Lab tool map
+in teacher-notes.md for which target/tool goes with which technique across Days 13-19.</a:t>
             </a:r>
             <a:endParaRPr lang="en-US" dirty="0"/>
           </a:p>
